--- a/FITFUEL-Hostinger-CICD-Presentation.pptx
+++ b/FITFUEL-Hostinger-CICD-Presentation.pptx
@@ -111,7 +111,49 @@
       </a:defRPr>
     </a:lvl9pPr>
   </p:defaultTextStyle>
+  <p:extLst>
+    <p:ext uri="{EFAFB233-063F-42B5-8137-9DF3F51BA10A}">
+      <p15:sldGuideLst xmlns:p15="http://schemas.microsoft.com/office/powerpoint/2012/main"/>
+    </p:ext>
+  </p:extLst>
 </p:presentation>
+</file>
+
+<file path=ppt/revisionInfo.xml><?xml version="1.0" encoding="utf-8"?>
+<p1510:revInfo xmlns:a="http://schemas.openxmlformats.org/drawingml/2006/main" xmlns:r="http://schemas.openxmlformats.org/officeDocument/2006/relationships" xmlns:p1510="http://schemas.microsoft.com/office/powerpoint/2015/10/main">
+  <p1510:revLst>
+    <p1510:client id="{3EF01F76-9064-4879-A81A-DC5312716B1D}" v="3" dt="2026-10-14T18:58:35.793"/>
+  </p1510:revLst>
+</p1510:revInfo>
+</file>
+
+<file path=ppt/changesInfos/changesInfo1.xml><?xml version="1.0" encoding="utf-8"?>
+<pc:chgInfo xmlns:a="http://schemas.openxmlformats.org/drawingml/2006/main" xmlns:r="http://schemas.openxmlformats.org/officeDocument/2006/relationships" xmlns:ac="http://schemas.microsoft.com/office/drawing/2013/main/command" xmlns:pc="http://schemas.microsoft.com/office/powerpoint/2013/main/command">
+  <pc:docChgLst>
+    <pc:chgData name="Aayush Sharma" userId="60a79ffc93a9b62b" providerId="LiveId" clId="{46299DD3-A4DF-45F3-8996-5374FE185D78}"/>
+    <pc:docChg chg="modSld">
+      <pc:chgData name="Aayush Sharma" userId="60a79ffc93a9b62b" providerId="LiveId" clId="{46299DD3-A4DF-45F3-8996-5374FE185D78}" dt="2026-10-14T18:58:35.792" v="2" actId="1076"/>
+      <pc:docMkLst>
+        <pc:docMk/>
+      </pc:docMkLst>
+      <pc:sldChg chg="modSp">
+        <pc:chgData name="Aayush Sharma" userId="60a79ffc93a9b62b" providerId="LiveId" clId="{46299DD3-A4DF-45F3-8996-5374FE185D78}" dt="2026-10-14T18:58:35.792" v="2" actId="1076"/>
+        <pc:sldMkLst>
+          <pc:docMk/>
+          <pc:sldMk cId="54748974" sldId="258"/>
+        </pc:sldMkLst>
+        <pc:spChg chg="mod">
+          <ac:chgData name="Aayush Sharma" userId="60a79ffc93a9b62b" providerId="LiveId" clId="{46299DD3-A4DF-45F3-8996-5374FE185D78}" dt="2026-10-14T18:58:35.792" v="2" actId="1076"/>
+          <ac:spMkLst>
+            <pc:docMk/>
+            <pc:sldMk cId="54748974" sldId="258"/>
+            <ac:spMk id="13" creationId="{4C3E3C1F-7226-0F41-0436-8A75D920D5A7}"/>
+          </ac:spMkLst>
+        </pc:spChg>
+      </pc:sldChg>
+    </pc:docChg>
+  </pc:docChgLst>
+</pc:chgInfo>
 </file>
 
 <file path=ppt/slideLayouts/slideLayout1.xml><?xml version="1.0" encoding="utf-8"?>
@@ -5429,7 +5471,7 @@
         </p:nvSpPr>
         <p:spPr>
           <a:xfrm>
-            <a:off x="5080000" y="2590800"/>
+            <a:off x="5080000" y="2628900"/>
             <a:ext cx="2082800" cy="1600200"/>
           </a:xfrm>
           <a:prstGeom prst="roundRect">
